--- a/CTA投研框架_10页_精修_v8_tmp.pptx
+++ b/CTA投研框架_10页_精修_v8_tmp.pptx
@@ -1538,241 +1538,6 @@
       <c:layout/>
       <c:overlay val="0"/>
     </c:legend>
-    <c:plotVisOnly val="1"/>
-    <c:dispBlanksAs val="gap"/>
-    <c:showDLblsOverMax val="0"/>
-  </c:chart>
-  <c:txPr>
-    <a:bodyPr/>
-    <a:lstStyle/>
-    <a:p>
-      <a:pPr>
-        <a:defRPr sz="1800"/>
-      </a:pPr>
-      <a:endParaRPr lang="en-US"/>
-    </a:p>
-  </c:txPr>
-  <c:externalData r:id="rId1">
-    <c:autoUpdate val="0"/>
-  </c:externalData>
-</c:chartSpace>
-</file>
-
-<file path=ppt/charts/chart6.xml><?xml version="1.0" encoding="utf-8"?>
-<c:chartSpace xmlns:c="http://schemas.openxmlformats.org/drawingml/2006/chart" xmlns:a="http://schemas.openxmlformats.org/drawingml/2006/main" xmlns:r="http://schemas.openxmlformats.org/officeDocument/2006/relationships">
-  <c:date1904 val="0"/>
-  <c:chart>
-    <c:title>
-      <c:tx>
-        <c:rich>
-          <a:bodyPr/>
-          <a:lstStyle/>
-          <a:p>
-            <a:r>
-              <a:t>PnL 日内平均走势</a:t>
-            </a:r>
-          </a:p>
-        </c:rich>
-      </c:tx>
-      <c:layout/>
-      <c:overlay val="0"/>
-    </c:title>
-    <c:autoTitleDeleted val="0"/>
-    <c:plotArea>
-      <c:lineChart>
-        <c:grouping val="standard"/>
-        <c:varyColors val="0"/>
-        <c:ser>
-          <c:idx val="0"/>
-          <c:order val="0"/>
-          <c:tx>
-            <c:strRef>
-              <c:f>Sheet1!$B$1</c:f>
-              <c:strCache>
-                <c:ptCount val="1"/>
-                <c:pt idx="0">
-                  <c:v>平均PnL</c:v>
-                </c:pt>
-              </c:strCache>
-            </c:strRef>
-          </c:tx>
-          <c:spPr>
-            <a:ln w="35560">
-              <a:solidFill>
-                <a:srgbClr val="AC7626"/>
-              </a:solidFill>
-            </a:ln>
-          </c:spPr>
-          <c:marker>
-            <c:symbol val="none"/>
-          </c:marker>
-          <c:cat>
-            <c:strRef>
-              <c:f>Sheet1!$A$2:$A$17</c:f>
-              <c:strCache>
-                <c:ptCount val="16"/>
-                <c:pt idx="0">
-                  <c:v>21:00</c:v>
-                </c:pt>
-                <c:pt idx="1">
-                  <c:v>21:30</c:v>
-                </c:pt>
-                <c:pt idx="2">
-                  <c:v>22:00</c:v>
-                </c:pt>
-                <c:pt idx="3">
-                  <c:v>22:30</c:v>
-                </c:pt>
-                <c:pt idx="4">
-                  <c:v>23:00</c:v>
-                </c:pt>
-                <c:pt idx="5">
-                  <c:v>23:30</c:v>
-                </c:pt>
-                <c:pt idx="6">
-                  <c:v>09:00</c:v>
-                </c:pt>
-                <c:pt idx="7">
-                  <c:v>09:30</c:v>
-                </c:pt>
-                <c:pt idx="8">
-                  <c:v>10:00</c:v>
-                </c:pt>
-                <c:pt idx="9">
-                  <c:v>10:30</c:v>
-                </c:pt>
-                <c:pt idx="10">
-                  <c:v>11:00</c:v>
-                </c:pt>
-                <c:pt idx="11">
-                  <c:v>11:30</c:v>
-                </c:pt>
-                <c:pt idx="12">
-                  <c:v>13:30</c:v>
-                </c:pt>
-                <c:pt idx="13">
-                  <c:v>14:00</c:v>
-                </c:pt>
-                <c:pt idx="14">
-                  <c:v>14:30</c:v>
-                </c:pt>
-                <c:pt idx="15">
-                  <c:v>15:00</c:v>
-                </c:pt>
-              </c:strCache>
-            </c:strRef>
-          </c:cat>
-          <c:val>
-            <c:numRef>
-              <c:f>Sheet1!$B$2:$B$17</c:f>
-              <c:numCache>
-                <c:formatCode>General</c:formatCode>
-                <c:ptCount val="16"/>
-                <c:pt idx="0">
-                  <c:v>0.45</c:v>
-                </c:pt>
-                <c:pt idx="1">
-                  <c:v>0.47</c:v>
-                </c:pt>
-                <c:pt idx="2">
-                  <c:v>0.46</c:v>
-                </c:pt>
-                <c:pt idx="3">
-                  <c:v>0.49</c:v>
-                </c:pt>
-                <c:pt idx="4">
-                  <c:v>0.48</c:v>
-                </c:pt>
-                <c:pt idx="5">
-                  <c:v>0.52</c:v>
-                </c:pt>
-                <c:pt idx="6">
-                  <c:v>1.1</c:v>
-                </c:pt>
-                <c:pt idx="7">
-                  <c:v>1.13</c:v>
-                </c:pt>
-                <c:pt idx="8">
-                  <c:v>1.12</c:v>
-                </c:pt>
-                <c:pt idx="9">
-                  <c:v>1.16</c:v>
-                </c:pt>
-                <c:pt idx="10">
-                  <c:v>1.15</c:v>
-                </c:pt>
-                <c:pt idx="11">
-                  <c:v>1.19</c:v>
-                </c:pt>
-                <c:pt idx="12">
-                  <c:v>1.21</c:v>
-                </c:pt>
-                <c:pt idx="13">
-                  <c:v>1.24</c:v>
-                </c:pt>
-                <c:pt idx="14">
-                  <c:v>1.23</c:v>
-                </c:pt>
-                <c:pt idx="15">
-                  <c:v>1.27</c:v>
-                </c:pt>
-              </c:numCache>
-            </c:numRef>
-          </c:val>
-          <c:smooth val="0"/>
-        </c:ser>
-        <c:marker val="1"/>
-        <c:smooth val="0"/>
-        <c:axId val="2118791784"/>
-        <c:axId val="2140495176"/>
-      </c:lineChart>
-      <c:catAx>
-        <c:axId val="2118791784"/>
-        <c:scaling>
-          <c:orientation val="minMax"/>
-        </c:scaling>
-        <c:delete val="0"/>
-        <c:axPos val="b"/>
-        <c:majorTickMark val="out"/>
-        <c:minorTickMark val="none"/>
-        <c:tickLblPos val="nextTo"/>
-        <c:txPr>
-          <a:bodyPr/>
-          <a:lstStyle/>
-          <a:p>
-            <a:pPr>
-              <a:defRPr sz="800"/>
-            </a:pPr>
-          </a:p>
-        </c:txPr>
-        <c:crossAx val="2140495176"/>
-        <c:crosses val="autoZero"/>
-        <c:auto val="1"/>
-        <c:lblAlgn val="ctr"/>
-        <c:lblOffset val="100"/>
-        <c:noMultiLvlLbl val="0"/>
-      </c:catAx>
-      <c:valAx>
-        <c:axId val="2140495176"/>
-        <c:scaling/>
-        <c:delete val="0"/>
-        <c:axPos val="l"/>
-        <c:majorTickMark val="out"/>
-        <c:minorTickMark val="none"/>
-        <c:tickLblPos val="nextTo"/>
-        <c:txPr>
-          <a:bodyPr/>
-          <a:lstStyle/>
-          <a:p>
-            <a:pPr>
-              <a:defRPr sz="800"/>
-            </a:pPr>
-          </a:p>
-        </c:txPr>
-        <c:crossAx val="2118791784"/>
-        <c:crosses val="autoZero"/>
-      </c:valAx>
-    </c:plotArea>
     <c:plotVisOnly val="1"/>
     <c:dispBlanksAs val="gap"/>
     <c:showDLblsOverMax val="0"/>
@@ -5797,86 +5562,7 @@
       </p:sp>
       <p:sp>
         <p:nvSpPr>
-          <p:cNvPr id="10" name="Rounded Rectangle 9"/>
-          <p:cNvSpPr/>
-          <p:nvPr/>
-        </p:nvSpPr>
-        <p:spPr>
-          <a:xfrm>
-            <a:off x="685800" y="5715000"/>
-            <a:ext cx="10972800" cy="384048"/>
-          </a:xfrm>
-          <a:prstGeom prst="roundRect">
-            <a:avLst/>
-          </a:prstGeom>
-          <a:solidFill>
-            <a:srgbClr val="E8EFF8"/>
-          </a:solidFill>
-          <a:ln>
-            <a:noFill/>
-          </a:ln>
-        </p:spPr>
-        <p:style>
-          <a:lnRef idx="1">
-            <a:schemeClr val="accent1"/>
-          </a:lnRef>
-          <a:fillRef idx="3">
-            <a:schemeClr val="accent1"/>
-          </a:fillRef>
-          <a:effectRef idx="2">
-            <a:schemeClr val="accent1"/>
-          </a:effectRef>
-          <a:fontRef idx="minor">
-            <a:schemeClr val="lt1"/>
-          </a:fontRef>
-        </p:style>
-        <p:txBody>
-          <a:bodyPr rtlCol="0" anchor="ctr"/>
-          <a:lstStyle/>
-          <a:p>
-            <a:pPr algn="ctr"/>
-          </a:p>
-        </p:txBody>
-      </p:sp>
-      <p:sp>
-        <p:nvSpPr>
-          <p:cNvPr id="11" name="TextBox 10"/>
-          <p:cNvSpPr txBox="1"/>
-          <p:nvPr/>
-        </p:nvSpPr>
-        <p:spPr>
-          <a:xfrm>
-            <a:off x="850392" y="5806440"/>
-            <a:ext cx="10643616" cy="201167"/>
-          </a:xfrm>
-          <a:prstGeom prst="rect">
-            <a:avLst/>
-          </a:prstGeom>
-          <a:noFill/>
-        </p:spPr>
-        <p:txBody>
-          <a:bodyPr wrap="none">
-            <a:spAutoFit/>
-          </a:bodyPr>
-          <a:lstStyle/>
-          <a:p>
-            <a:pPr algn="ctr">
-              <a:defRPr sz="1200" b="1">
-                <a:solidFill>
-                  <a:srgbClr val="132B4A"/>
-                </a:solidFill>
-                <a:latin typeface="Microsoft YaHei"/>
-              </a:defRPr>
-            </a:pPr>
-            <a:r>
-              <a:t>核心目标：在可控风险前提下，稳定输出可解释、可复制的超额收益。</a:t>
-            </a:r>
-          </a:p>
-        </p:txBody>
-      </p:sp>
-      <p:sp>
-        <p:nvSpPr>
-          <p:cNvPr id="12" name="TextBox 11"/>
+          <p:cNvPr id="10" name="TextBox 9"/>
           <p:cNvSpPr txBox="1"/>
           <p:nvPr/>
         </p:nvSpPr>
@@ -6690,86 +6376,7 @@
       </p:sp>
       <p:sp>
         <p:nvSpPr>
-          <p:cNvPr id="19" name="Rounded Rectangle 18"/>
-          <p:cNvSpPr/>
-          <p:nvPr/>
-        </p:nvSpPr>
-        <p:spPr>
-          <a:xfrm>
-            <a:off x="685800" y="5715000"/>
-            <a:ext cx="10972800" cy="384048"/>
-          </a:xfrm>
-          <a:prstGeom prst="roundRect">
-            <a:avLst/>
-          </a:prstGeom>
-          <a:solidFill>
-            <a:srgbClr val="E8EFF8"/>
-          </a:solidFill>
-          <a:ln>
-            <a:noFill/>
-          </a:ln>
-        </p:spPr>
-        <p:style>
-          <a:lnRef idx="1">
-            <a:schemeClr val="accent1"/>
-          </a:lnRef>
-          <a:fillRef idx="3">
-            <a:schemeClr val="accent1"/>
-          </a:fillRef>
-          <a:effectRef idx="2">
-            <a:schemeClr val="accent1"/>
-          </a:effectRef>
-          <a:fontRef idx="minor">
-            <a:schemeClr val="lt1"/>
-          </a:fontRef>
-        </p:style>
-        <p:txBody>
-          <a:bodyPr rtlCol="0" anchor="ctr"/>
-          <a:lstStyle/>
-          <a:p>
-            <a:pPr algn="ctr"/>
-          </a:p>
-        </p:txBody>
-      </p:sp>
-      <p:sp>
-        <p:nvSpPr>
-          <p:cNvPr id="20" name="TextBox 19"/>
-          <p:cNvSpPr txBox="1"/>
-          <p:nvPr/>
-        </p:nvSpPr>
-        <p:spPr>
-          <a:xfrm>
-            <a:off x="850392" y="5806440"/>
-            <a:ext cx="10643616" cy="201167"/>
-          </a:xfrm>
-          <a:prstGeom prst="rect">
-            <a:avLst/>
-          </a:prstGeom>
-          <a:noFill/>
-        </p:spPr>
-        <p:txBody>
-          <a:bodyPr wrap="none">
-            <a:spAutoFit/>
-          </a:bodyPr>
-          <a:lstStyle/>
-          <a:p>
-            <a:pPr algn="ctr">
-              <a:defRPr sz="1200" b="1">
-                <a:solidFill>
-                  <a:srgbClr val="132B4A"/>
-                </a:solidFill>
-                <a:latin typeface="Microsoft YaHei"/>
-              </a:defRPr>
-            </a:pPr>
-            <a:r>
-              <a:t>流程稳定性 = 数据稳定性 + 模型稳定性 + 执行稳定性</a:t>
-            </a:r>
-          </a:p>
-        </p:txBody>
-      </p:sp>
-      <p:sp>
-        <p:nvSpPr>
-          <p:cNvPr id="21" name="TextBox 20"/>
+          <p:cNvPr id="19" name="TextBox 18"/>
           <p:cNvSpPr txBox="1"/>
           <p:nvPr/>
         </p:nvSpPr>
@@ -7632,86 +7239,7 @@
       </p:sp>
       <p:sp>
         <p:nvSpPr>
-          <p:cNvPr id="18" name="Rounded Rectangle 17"/>
-          <p:cNvSpPr/>
-          <p:nvPr/>
-        </p:nvSpPr>
-        <p:spPr>
-          <a:xfrm>
-            <a:off x="749808" y="6126480"/>
-            <a:ext cx="10881360" cy="411480"/>
-          </a:xfrm>
-          <a:prstGeom prst="roundRect">
-            <a:avLst/>
-          </a:prstGeom>
-          <a:solidFill>
-            <a:srgbClr val="E8EFF8"/>
-          </a:solidFill>
-          <a:ln>
-            <a:noFill/>
-          </a:ln>
-        </p:spPr>
-        <p:style>
-          <a:lnRef idx="1">
-            <a:schemeClr val="accent1"/>
-          </a:lnRef>
-          <a:fillRef idx="3">
-            <a:schemeClr val="accent1"/>
-          </a:fillRef>
-          <a:effectRef idx="2">
-            <a:schemeClr val="accent1"/>
-          </a:effectRef>
-          <a:fontRef idx="minor">
-            <a:schemeClr val="lt1"/>
-          </a:fontRef>
-        </p:style>
-        <p:txBody>
-          <a:bodyPr rtlCol="0" anchor="ctr"/>
-          <a:lstStyle/>
-          <a:p>
-            <a:pPr algn="ctr"/>
-          </a:p>
-        </p:txBody>
-      </p:sp>
-      <p:sp>
-        <p:nvSpPr>
-          <p:cNvPr id="19" name="TextBox 18"/>
-          <p:cNvSpPr txBox="1"/>
-          <p:nvPr/>
-        </p:nvSpPr>
-        <p:spPr>
-          <a:xfrm>
-            <a:off x="914400" y="6217920"/>
-            <a:ext cx="10552176" cy="228600"/>
-          </a:xfrm>
-          <a:prstGeom prst="rect">
-            <a:avLst/>
-          </a:prstGeom>
-          <a:noFill/>
-        </p:spPr>
-        <p:txBody>
-          <a:bodyPr wrap="none">
-            <a:spAutoFit/>
-          </a:bodyPr>
-          <a:lstStyle/>
-          <a:p>
-            <a:pPr algn="ctr">
-              <a:defRPr sz="1200" b="1">
-                <a:solidFill>
-                  <a:srgbClr val="132B4A"/>
-                </a:solidFill>
-                <a:latin typeface="Microsoft YaHei"/>
-              </a:defRPr>
-            </a:pPr>
-            <a:r>
-              <a:t>数据不是越多越好，而是要覆盖不同市场状态，并可持续验证有效性。</a:t>
-            </a:r>
-          </a:p>
-        </p:txBody>
-      </p:sp>
-      <p:sp>
-        <p:nvSpPr>
-          <p:cNvPr id="20" name="TextBox 19"/>
+          <p:cNvPr id="18" name="TextBox 17"/>
           <p:cNvSpPr txBox="1"/>
           <p:nvPr/>
         </p:nvSpPr>
@@ -8622,86 +8150,7 @@
       </p:sp>
       <p:sp>
         <p:nvSpPr>
-          <p:cNvPr id="18" name="Rounded Rectangle 17"/>
-          <p:cNvSpPr/>
-          <p:nvPr/>
-        </p:nvSpPr>
-        <p:spPr>
-          <a:xfrm>
-            <a:off x="731520" y="5715000"/>
-            <a:ext cx="10881360" cy="384048"/>
-          </a:xfrm>
-          <a:prstGeom prst="roundRect">
-            <a:avLst/>
-          </a:prstGeom>
-          <a:solidFill>
-            <a:srgbClr val="E8EFF8"/>
-          </a:solidFill>
-          <a:ln>
-            <a:noFill/>
-          </a:ln>
-        </p:spPr>
-        <p:style>
-          <a:lnRef idx="1">
-            <a:schemeClr val="accent1"/>
-          </a:lnRef>
-          <a:fillRef idx="3">
-            <a:schemeClr val="accent1"/>
-          </a:fillRef>
-          <a:effectRef idx="2">
-            <a:schemeClr val="accent1"/>
-          </a:effectRef>
-          <a:fontRef idx="minor">
-            <a:schemeClr val="lt1"/>
-          </a:fontRef>
-        </p:style>
-        <p:txBody>
-          <a:bodyPr rtlCol="0" anchor="ctr"/>
-          <a:lstStyle/>
-          <a:p>
-            <a:pPr algn="ctr"/>
-          </a:p>
-        </p:txBody>
-      </p:sp>
-      <p:sp>
-        <p:nvSpPr>
-          <p:cNvPr id="19" name="TextBox 18"/>
-          <p:cNvSpPr txBox="1"/>
-          <p:nvPr/>
-        </p:nvSpPr>
-        <p:spPr>
-          <a:xfrm>
-            <a:off x="896112" y="5806440"/>
-            <a:ext cx="10552176" cy="201167"/>
-          </a:xfrm>
-          <a:prstGeom prst="rect">
-            <a:avLst/>
-          </a:prstGeom>
-          <a:noFill/>
-        </p:spPr>
-        <p:txBody>
-          <a:bodyPr wrap="none">
-            <a:spAutoFit/>
-          </a:bodyPr>
-          <a:lstStyle/>
-          <a:p>
-            <a:pPr algn="ctr">
-              <a:defRPr sz="1200" b="1">
-                <a:solidFill>
-                  <a:srgbClr val="132B4A"/>
-                </a:solidFill>
-                <a:latin typeface="Microsoft YaHei"/>
-              </a:defRPr>
-            </a:pPr>
-            <a:r>
-              <a:t>推荐做法：主因子负责稳定收益，增量因子负责提升边际收益。</a:t>
-            </a:r>
-          </a:p>
-        </p:txBody>
-      </p:sp>
-      <p:sp>
-        <p:nvSpPr>
-          <p:cNvPr id="20" name="TextBox 19"/>
+          <p:cNvPr id="18" name="TextBox 17"/>
           <p:cNvSpPr txBox="1"/>
           <p:nvPr/>
         </p:nvSpPr>
@@ -9246,86 +8695,7 @@
       </p:graphicFrame>
       <p:sp>
         <p:nvSpPr>
-          <p:cNvPr id="14" name="Rounded Rectangle 13"/>
-          <p:cNvSpPr/>
-          <p:nvPr/>
-        </p:nvSpPr>
-        <p:spPr>
-          <a:xfrm>
-            <a:off x="594360" y="5989320"/>
-            <a:ext cx="10972800" cy="384048"/>
-          </a:xfrm>
-          <a:prstGeom prst="roundRect">
-            <a:avLst/>
-          </a:prstGeom>
-          <a:solidFill>
-            <a:srgbClr val="E8EFF8"/>
-          </a:solidFill>
-          <a:ln>
-            <a:noFill/>
-          </a:ln>
-        </p:spPr>
-        <p:style>
-          <a:lnRef idx="1">
-            <a:schemeClr val="accent1"/>
-          </a:lnRef>
-          <a:fillRef idx="3">
-            <a:schemeClr val="accent1"/>
-          </a:fillRef>
-          <a:effectRef idx="2">
-            <a:schemeClr val="accent1"/>
-          </a:effectRef>
-          <a:fontRef idx="minor">
-            <a:schemeClr val="lt1"/>
-          </a:fontRef>
-        </p:style>
-        <p:txBody>
-          <a:bodyPr rtlCol="0" anchor="ctr"/>
-          <a:lstStyle/>
-          <a:p>
-            <a:pPr algn="ctr"/>
-          </a:p>
-        </p:txBody>
-      </p:sp>
-      <p:sp>
-        <p:nvSpPr>
-          <p:cNvPr id="15" name="TextBox 14"/>
-          <p:cNvSpPr txBox="1"/>
-          <p:nvPr/>
-        </p:nvSpPr>
-        <p:spPr>
-          <a:xfrm>
-            <a:off x="758952" y="6080759"/>
-            <a:ext cx="10643616" cy="201167"/>
-          </a:xfrm>
-          <a:prstGeom prst="rect">
-            <a:avLst/>
-          </a:prstGeom>
-          <a:noFill/>
-        </p:spPr>
-        <p:txBody>
-          <a:bodyPr wrap="none">
-            <a:spAutoFit/>
-          </a:bodyPr>
-          <a:lstStyle/>
-          <a:p>
-            <a:pPr algn="ctr">
-              <a:defRPr sz="1200" b="1">
-                <a:solidFill>
-                  <a:srgbClr val="132B4A"/>
-                </a:solidFill>
-                <a:latin typeface="Microsoft YaHei"/>
-              </a:defRPr>
-            </a:pPr>
-            <a:r>
-              <a:t>评估原则：先看稳定性，再看收益弹性，最后看可交易性。</a:t>
-            </a:r>
-          </a:p>
-        </p:txBody>
-      </p:sp>
-      <p:sp>
-        <p:nvSpPr>
-          <p:cNvPr id="16" name="TextBox 15"/>
+          <p:cNvPr id="14" name="TextBox 13"/>
           <p:cNvSpPr txBox="1"/>
           <p:nvPr/>
         </p:nvSpPr>
@@ -9562,8 +8932,8 @@
           <p:nvPr/>
         </p:nvGraphicFramePr>
         <p:xfrm>
-          <a:off x="1618488" y="1600200"/>
-          <a:ext cx="8961120" cy="2240280"/>
+          <a:off x="2331720" y="1463040"/>
+          <a:ext cx="7543800" cy="2514600"/>
         </p:xfrm>
         <a:graphic>
           <a:graphicData uri="http://schemas.openxmlformats.org/drawingml/2006/chart">
@@ -9571,24 +8941,30 @@
           </a:graphicData>
         </a:graphic>
       </p:graphicFrame>
-      <p:graphicFrame>
-        <p:nvGraphicFramePr>
-          <p:cNvPr id="7" name="Chart 6"/>
-          <p:cNvGraphicFramePr>
-            <a:graphicFrameLocks noGrp="1"/>
-          </p:cNvGraphicFramePr>
-          <p:nvPr/>
-        </p:nvGraphicFramePr>
-        <p:xfrm>
-          <a:off x="1618488" y="4069080"/>
-          <a:ext cx="8961120" cy="1508760"/>
-        </p:xfrm>
-        <a:graphic>
-          <a:graphicData uri="http://schemas.openxmlformats.org/drawingml/2006/chart">
-            <c:chart xmlns:c="http://schemas.openxmlformats.org/drawingml/2006/chart" r:id="rId3"/>
-          </a:graphicData>
-        </a:graphic>
-      </p:graphicFrame>
+      <p:pic>
+        <p:nvPicPr>
+          <p:cNvPr id="7" name="Picture 6" descr="image.png"/>
+          <p:cNvPicPr>
+            <a:picLocks noChangeAspect="1"/>
+          </p:cNvPicPr>
+          <p:nvPr/>
+        </p:nvPicPr>
+        <p:blipFill>
+          <a:blip r:embed="rId3"/>
+          <a:stretch>
+            <a:fillRect/>
+          </a:stretch>
+        </p:blipFill>
+        <p:spPr>
+          <a:xfrm>
+            <a:off x="2331720" y="4160520"/>
+            <a:ext cx="7543800" cy="1783080"/>
+          </a:xfrm>
+          <a:prstGeom prst="rect">
+            <a:avLst/>
+          </a:prstGeom>
+        </p:spPr>
+      </p:pic>
       <p:sp>
         <p:nvSpPr>
           <p:cNvPr id="8" name="TextBox 7"/>
@@ -9977,7 +9353,7 @@
               </a:defRPr>
             </a:pPr>
             <a:r>
-              <a:t>先做波动率标准化，再进行权重合成。</a:t>
+              <a:t>波动率标准化后再合成权重</a:t>
             </a:r>
           </a:p>
           <a:p>
@@ -9993,7 +9369,7 @@
               </a:defRPr>
             </a:pPr>
             <a:r>
-              <a:t>新增因子需与现有组合保持低相关。</a:t>
+              <a:t>新因子与现有组合须保持低相关</a:t>
             </a:r>
           </a:p>
           <a:p>
@@ -10009,7 +9385,7 @@
               </a:defRPr>
             </a:pPr>
             <a:r>
-              <a:t>评估标准不是单腿收益，而是整体组合增益。</a:t>
+              <a:t>评估标准是整体组合增益，而非单腿收益</a:t>
             </a:r>
           </a:p>
           <a:p>
@@ -10025,7 +9401,7 @@
               </a:defRPr>
             </a:pPr>
             <a:r>
-              <a:t>控制单策略权重上限，避免局部信号主导全组合。</a:t>
+              <a:t>单策略权重设上限，防止局部主导</a:t>
             </a:r>
           </a:p>
         </p:txBody>
@@ -10149,7 +9525,7 @@
               </a:defRPr>
             </a:pPr>
             <a:r>
-              <a:t>组合结构建议</a:t>
+              <a:t>组合结构</a:t>
             </a:r>
           </a:p>
         </p:txBody>
@@ -10188,7 +9564,7 @@
               </a:defRPr>
             </a:pPr>
             <a:r>
-              <a:t>趋势：捕捉主线行情。</a:t>
+              <a:t>趋势类 — 捕捉主线行情</a:t>
             </a:r>
           </a:p>
           <a:p>
@@ -10204,7 +9580,7 @@
               </a:defRPr>
             </a:pPr>
             <a:r>
-              <a:t>反转：补足震荡阶段收益。</a:t>
+              <a:t>反转类 — 补足震荡阶段收益</a:t>
             </a:r>
           </a:p>
           <a:p>
@@ -10220,7 +9596,7 @@
               </a:defRPr>
             </a:pPr>
             <a:r>
-              <a:t>另类：提供增量信息。</a:t>
+              <a:t>另类类 — 提供增量信息</a:t>
             </a:r>
           </a:p>
           <a:p>
@@ -10236,7 +9612,7 @@
               </a:defRPr>
             </a:pPr>
             <a:r>
-              <a:t>按Sector与品种分层配置，避免一刀切。</a:t>
+              <a:t>按Sector与品种分层配置</a:t>
             </a:r>
           </a:p>
           <a:p>
@@ -10252,7 +9628,7 @@
               </a:defRPr>
             </a:pPr>
             <a:r>
-              <a:t>按月复核风格暴露，避免组合漂移。</a:t>
+              <a:t>按月复核风格暴露</a:t>
             </a:r>
           </a:p>
         </p:txBody>
@@ -10415,7 +9791,7 @@
               </a:defRPr>
             </a:pPr>
             <a:r>
-              <a:t>优先保留参数高原，而非参数尖峰。</a:t>
+              <a:t>优先参数高原，避免参数尖峰</a:t>
             </a:r>
           </a:p>
           <a:p>
@@ -10431,7 +9807,7 @@
               </a:defRPr>
             </a:pPr>
             <a:r>
-              <a:t>关注净值平滑度与回撤修复速度。</a:t>
+              <a:t>关注净值平滑度与回撤修复速度</a:t>
             </a:r>
           </a:p>
           <a:p>
@@ -10447,7 +9823,7 @@
               </a:defRPr>
             </a:pPr>
             <a:r>
-              <a:t>对相关性、容量与换手进行联合约束。</a:t>
+              <a:t>相关性、容量与换手联合约束</a:t>
             </a:r>
           </a:p>
           <a:p>
@@ -10463,93 +9839,14 @@
               </a:defRPr>
             </a:pPr>
             <a:r>
-              <a:t>在同等收益下优先选择交易成本更低的组合。</a:t>
-            </a:r>
-          </a:p>
-        </p:txBody>
-      </p:sp>
-      <p:sp>
-        <p:nvSpPr>
-          <p:cNvPr id="18" name="Rounded Rectangle 17"/>
-          <p:cNvSpPr/>
-          <p:nvPr/>
-        </p:nvSpPr>
-        <p:spPr>
-          <a:xfrm>
-            <a:off x="640080" y="5715000"/>
-            <a:ext cx="10972800" cy="384048"/>
-          </a:xfrm>
-          <a:prstGeom prst="roundRect">
-            <a:avLst/>
-          </a:prstGeom>
-          <a:solidFill>
-            <a:srgbClr val="E8EFF8"/>
-          </a:solidFill>
-          <a:ln>
-            <a:noFill/>
-          </a:ln>
-        </p:spPr>
-        <p:style>
-          <a:lnRef idx="1">
-            <a:schemeClr val="accent1"/>
-          </a:lnRef>
-          <a:fillRef idx="3">
-            <a:schemeClr val="accent1"/>
-          </a:fillRef>
-          <a:effectRef idx="2">
-            <a:schemeClr val="accent1"/>
-          </a:effectRef>
-          <a:fontRef idx="minor">
-            <a:schemeClr val="lt1"/>
-          </a:fontRef>
-        </p:style>
-        <p:txBody>
-          <a:bodyPr rtlCol="0" anchor="ctr"/>
-          <a:lstStyle/>
-          <a:p>
-            <a:pPr algn="ctr"/>
-          </a:p>
-        </p:txBody>
-      </p:sp>
-      <p:sp>
-        <p:nvSpPr>
-          <p:cNvPr id="19" name="TextBox 18"/>
-          <p:cNvSpPr txBox="1"/>
-          <p:nvPr/>
-        </p:nvSpPr>
-        <p:spPr>
-          <a:xfrm>
-            <a:off x="804671" y="5806440"/>
-            <a:ext cx="10643616" cy="201167"/>
-          </a:xfrm>
-          <a:prstGeom prst="rect">
-            <a:avLst/>
-          </a:prstGeom>
-          <a:noFill/>
-        </p:spPr>
-        <p:txBody>
-          <a:bodyPr wrap="none">
-            <a:spAutoFit/>
-          </a:bodyPr>
-          <a:lstStyle/>
-          <a:p>
-            <a:pPr algn="ctr">
-              <a:defRPr sz="1200" b="1">
-                <a:solidFill>
-                  <a:srgbClr val="132B4A"/>
-                </a:solidFill>
-                <a:latin typeface="Microsoft YaHei"/>
-              </a:defRPr>
-            </a:pPr>
-            <a:r>
-              <a:t>组合目标：在可控回撤前提下，持续输出可复制的超额收益。</a:t>
-            </a:r>
-          </a:p>
-        </p:txBody>
-      </p:sp>
-      <p:sp>
-        <p:nvSpPr>
-          <p:cNvPr id="20" name="TextBox 19"/>
+              <a:t>同等收益下优选低交易成本方案</a:t>
+            </a:r>
+          </a:p>
+        </p:txBody>
+      </p:sp>
+      <p:sp>
+        <p:nvSpPr>
+          <p:cNvPr id="18" name="TextBox 17"/>
           <p:cNvSpPr txBox="1"/>
           <p:nvPr/>
         </p:nvSpPr>
@@ -11396,86 +10693,7 @@
       </p:sp>
       <p:sp>
         <p:nvSpPr>
-          <p:cNvPr id="18" name="Rounded Rectangle 17"/>
-          <p:cNvSpPr/>
-          <p:nvPr/>
-        </p:nvSpPr>
-        <p:spPr>
-          <a:xfrm>
-            <a:off x="640080" y="5715000"/>
-            <a:ext cx="10972800" cy="384048"/>
-          </a:xfrm>
-          <a:prstGeom prst="roundRect">
-            <a:avLst/>
-          </a:prstGeom>
-          <a:solidFill>
-            <a:srgbClr val="E8EFF8"/>
-          </a:solidFill>
-          <a:ln>
-            <a:noFill/>
-          </a:ln>
-        </p:spPr>
-        <p:style>
-          <a:lnRef idx="1">
-            <a:schemeClr val="accent1"/>
-          </a:lnRef>
-          <a:fillRef idx="3">
-            <a:schemeClr val="accent1"/>
-          </a:fillRef>
-          <a:effectRef idx="2">
-            <a:schemeClr val="accent1"/>
-          </a:effectRef>
-          <a:fontRef idx="minor">
-            <a:schemeClr val="lt1"/>
-          </a:fontRef>
-        </p:style>
-        <p:txBody>
-          <a:bodyPr rtlCol="0" anchor="ctr"/>
-          <a:lstStyle/>
-          <a:p>
-            <a:pPr algn="ctr"/>
-          </a:p>
-        </p:txBody>
-      </p:sp>
-      <p:sp>
-        <p:nvSpPr>
-          <p:cNvPr id="19" name="TextBox 18"/>
-          <p:cNvSpPr txBox="1"/>
-          <p:nvPr/>
-        </p:nvSpPr>
-        <p:spPr>
-          <a:xfrm>
-            <a:off x="804671" y="5806440"/>
-            <a:ext cx="10643616" cy="201167"/>
-          </a:xfrm>
-          <a:prstGeom prst="rect">
-            <a:avLst/>
-          </a:prstGeom>
-          <a:noFill/>
-        </p:spPr>
-        <p:txBody>
-          <a:bodyPr wrap="none">
-            <a:spAutoFit/>
-          </a:bodyPr>
-          <a:lstStyle/>
-          <a:p>
-            <a:pPr algn="ctr">
-              <a:defRPr sz="1200" b="1">
-                <a:solidFill>
-                  <a:srgbClr val="132B4A"/>
-                </a:solidFill>
-                <a:latin typeface="Microsoft YaHei"/>
-              </a:defRPr>
-            </a:pPr>
-            <a:r>
-              <a:t>风控不是‘事后止损’，而是覆盖盘前、盘中、盘后的闭环管理。</a:t>
-            </a:r>
-          </a:p>
-        </p:txBody>
-      </p:sp>
-      <p:sp>
-        <p:nvSpPr>
-          <p:cNvPr id="20" name="TextBox 19"/>
+          <p:cNvPr id="18" name="TextBox 17"/>
           <p:cNvSpPr txBox="1"/>
           <p:nvPr/>
         </p:nvSpPr>
@@ -12290,86 +11508,7 @@
       </p:sp>
       <p:sp>
         <p:nvSpPr>
-          <p:cNvPr id="18" name="Rounded Rectangle 17"/>
-          <p:cNvSpPr/>
-          <p:nvPr/>
-        </p:nvSpPr>
-        <p:spPr>
-          <a:xfrm>
-            <a:off x="640080" y="5806440"/>
-            <a:ext cx="10972800" cy="292608"/>
-          </a:xfrm>
-          <a:prstGeom prst="roundRect">
-            <a:avLst/>
-          </a:prstGeom>
-          <a:solidFill>
-            <a:srgbClr val="E8EFF8"/>
-          </a:solidFill>
-          <a:ln>
-            <a:noFill/>
-          </a:ln>
-        </p:spPr>
-        <p:style>
-          <a:lnRef idx="1">
-            <a:schemeClr val="accent1"/>
-          </a:lnRef>
-          <a:fillRef idx="3">
-            <a:schemeClr val="accent1"/>
-          </a:fillRef>
-          <a:effectRef idx="2">
-            <a:schemeClr val="accent1"/>
-          </a:effectRef>
-          <a:fontRef idx="minor">
-            <a:schemeClr val="lt1"/>
-          </a:fontRef>
-        </p:style>
-        <p:txBody>
-          <a:bodyPr rtlCol="0" anchor="ctr"/>
-          <a:lstStyle/>
-          <a:p>
-            <a:pPr algn="ctr"/>
-          </a:p>
-        </p:txBody>
-      </p:sp>
-      <p:sp>
-        <p:nvSpPr>
-          <p:cNvPr id="19" name="TextBox 18"/>
-          <p:cNvSpPr txBox="1"/>
-          <p:nvPr/>
-        </p:nvSpPr>
-        <p:spPr>
-          <a:xfrm>
-            <a:off x="804671" y="5897879"/>
-            <a:ext cx="10643616" cy="109728"/>
-          </a:xfrm>
-          <a:prstGeom prst="rect">
-            <a:avLst/>
-          </a:prstGeom>
-          <a:noFill/>
-        </p:spPr>
-        <p:txBody>
-          <a:bodyPr wrap="none">
-            <a:spAutoFit/>
-          </a:bodyPr>
-          <a:lstStyle/>
-          <a:p>
-            <a:pPr algn="ctr">
-              <a:defRPr sz="1200" b="1">
-                <a:solidFill>
-                  <a:srgbClr val="132B4A"/>
-                </a:solidFill>
-                <a:latin typeface="Microsoft YaHei"/>
-              </a:defRPr>
-            </a:pPr>
-            <a:r>
-              <a:t>执行质量指标：成交偏离、冲击成本、完成率。</a:t>
-            </a:r>
-          </a:p>
-        </p:txBody>
-      </p:sp>
-      <p:sp>
-        <p:nvSpPr>
-          <p:cNvPr id="20" name="TextBox 19"/>
+          <p:cNvPr id="18" name="TextBox 17"/>
           <p:cNvSpPr txBox="1"/>
           <p:nvPr/>
         </p:nvSpPr>
